--- a/Laboratorio/PeerStudent_Presentazione.pptx
+++ b/Laboratorio/PeerStudent_Presentazione.pptx
@@ -11328,7 +11328,7 @@
         <p:spPr>
           <a:xfrm>
             <a:off x="387900" y="1002427"/>
-            <a:ext cx="4160520" cy="3931920"/>
+            <a:ext cx="4160520" cy="2975173"/>
           </a:xfrm>
           <a:prstGeom prst="rect">
             <a:avLst/>
@@ -11517,8 +11517,13 @@
                   <a:srgbClr val="E6EFF4"/>
                 </a:solidFill>
               </a:rPr>
-              <a:t>  (?anno= , ?q= )</a:t>
-            </a:r>
+              <a:t>  </a:t>
+            </a:r>
+            <a:endParaRPr lang="it-IT" sz="1000" b="0" dirty="0">
+              <a:solidFill>
+                <a:srgbClr val="E6EFF4"/>
+              </a:solidFill>
+            </a:endParaRPr>
           </a:p>
           <a:p>
             <a:pPr>
@@ -11691,24 +11696,13 @@
                   <a:srgbClr val="E6EFF4"/>
                 </a:solidFill>
               </a:rPr>
-              <a:t>  (?</a:t>
-            </a:r>
-            <a:r>
-              <a:rPr sz="1000" b="0" dirty="0" err="1">
-                <a:solidFill>
-                  <a:srgbClr val="E6EFF4"/>
-                </a:solidFill>
-              </a:rPr>
-              <a:t>materiaId</a:t>
-            </a:r>
-            <a:r>
-              <a:rPr sz="1000" b="0" dirty="0">
-                <a:solidFill>
-                  <a:srgbClr val="E6EFF4"/>
-                </a:solidFill>
-              </a:rPr>
-              <a:t>= , ?q= )</a:t>
-            </a:r>
+              <a:t>  </a:t>
+            </a:r>
+            <a:endParaRPr lang="it-IT" sz="1000" dirty="0">
+              <a:solidFill>
+                <a:srgbClr val="E6EFF4"/>
+              </a:solidFill>
+            </a:endParaRPr>
           </a:p>
           <a:p>
             <a:pPr>
@@ -13125,7 +13119,7 @@
         </p:nvSpPr>
         <p:spPr>
           <a:xfrm>
-            <a:off x="5120640" y="1965960"/>
+            <a:off x="5116067" y="1980591"/>
             <a:ext cx="1874519" cy="534009"/>
           </a:xfrm>
           <a:prstGeom prst="rect">
@@ -13160,7 +13154,7 @@
               <a:buNone/>
             </a:pPr>
             <a:r>
-              <a:rPr lang="it" sz="850" b="1">
+              <a:rPr lang="it" sz="850" b="1" dirty="0">
                 <a:solidFill>
                   <a:schemeClr val="accent3"/>
                 </a:solidFill>
@@ -13171,7 +13165,7 @@
               </a:rPr>
               <a:t>feedback</a:t>
             </a:r>
-            <a:endParaRPr sz="1800" b="1">
+            <a:endParaRPr sz="1800" b="1" dirty="0">
               <a:solidFill>
                 <a:schemeClr val="accent3"/>
               </a:solidFill>
@@ -13184,7 +13178,7 @@
           <a:p>
             <a:pPr algn="l"/>
             <a:r>
-              <a:rPr sz="650" b="0">
+              <a:rPr sz="650" b="0" dirty="0">
                 <a:solidFill>
                   <a:srgbClr val="303030"/>
                 </a:solidFill>
@@ -13195,23 +13189,71 @@
           <a:p>
             <a:pPr algn="l"/>
             <a:r>
-              <a:rPr sz="650" b="0">
+              <a:rPr sz="650" b="0" dirty="0" err="1">
                 <a:solidFill>
                   <a:srgbClr val="303030"/>
                 </a:solidFill>
               </a:rPr>
-              <a:t>voto, commento, data</a:t>
+              <a:t>voto</a:t>
+            </a:r>
+            <a:r>
+              <a:rPr sz="650" b="0" dirty="0">
+                <a:solidFill>
+                  <a:srgbClr val="303030"/>
+                </a:solidFill>
+              </a:rPr>
+              <a:t>, </a:t>
+            </a:r>
+            <a:r>
+              <a:rPr sz="650" b="0" dirty="0" err="1">
+                <a:solidFill>
+                  <a:srgbClr val="303030"/>
+                </a:solidFill>
+              </a:rPr>
+              <a:t>commento</a:t>
+            </a:r>
+            <a:r>
+              <a:rPr sz="650" b="0" dirty="0">
+                <a:solidFill>
+                  <a:srgbClr val="303030"/>
+                </a:solidFill>
+              </a:rPr>
+              <a:t>, data</a:t>
             </a:r>
           </a:p>
           <a:p>
             <a:pPr algn="l"/>
             <a:r>
-              <a:rPr sz="650" b="0">
+              <a:rPr sz="650" b="0" dirty="0" err="1">
                 <a:solidFill>
                   <a:srgbClr val="303030"/>
                 </a:solidFill>
               </a:rPr>
-              <a:t>prenotazione_id (FK, unico)</a:t>
+              <a:t>prenotazione_id</a:t>
+            </a:r>
+            <a:r>
+              <a:rPr sz="650" b="0" dirty="0">
+                <a:solidFill>
+                  <a:srgbClr val="303030"/>
+                </a:solidFill>
+              </a:rPr>
+              <a:t> (FK, </a:t>
+            </a:r>
+            <a:r>
+              <a:rPr sz="650" b="0" dirty="0" err="1">
+                <a:solidFill>
+                  <a:srgbClr val="303030"/>
+                </a:solidFill>
+              </a:rPr>
+              <a:t>unico</a:t>
+            </a:r>
+            <a:r>
+              <a:rPr sz="650" b="0" dirty="0">
+                <a:solidFill>
+                  <a:srgbClr val="303030"/>
+                </a:solidFill>
+              </a:rPr>
+              <a:t>)</a:t>
             </a:r>
           </a:p>
         </p:txBody>

--- a/Laboratorio/PeerStudent_Presentazione.pptx
+++ b/Laboratorio/PeerStudent_Presentazione.pptx
@@ -8479,22 +8479,6 @@
                 </a:solidFill>
               </a:rPr>
               <a:t>Finestre</a:t>
-            </a:r>
-            <a:r>
-              <a:rPr sz="1000" b="1" dirty="0">
-                <a:solidFill>
-                  <a:srgbClr val="F6E7A1"/>
-                </a:solidFill>
-              </a:rPr>
-              <a:t> </a:t>
-            </a:r>
-            <a:r>
-              <a:rPr sz="1000" b="1" dirty="0" err="1">
-                <a:solidFill>
-                  <a:srgbClr val="F6E7A1"/>
-                </a:solidFill>
-              </a:rPr>
-              <a:t>modali</a:t>
             </a:r>
             <a:r>
               <a:rPr lang="it-IT" sz="1000" b="1" dirty="0">
